--- a/Denver/Common-Altitude-2027/decks/03-Founding-Underwriter.pptx
+++ b/Denver/Common-Altitude-2027/decks/03-Founding-Underwriter.pptx
@@ -531,7 +531,7 @@
           </a:p>
           <a:p>
             <a:r>
-              <a:t>Fund a disciplined path from ambition to a decision.</a:t>
+              <a:t>A proposed six-week feasibility stage.</a:t>
             </a:r>
           </a:p>
           <a:p/>
@@ -539,7 +539,7 @@
           <a:p/>
           <a:p>
             <a:r>
-              <a:t>Status: working proposal; site/date/partners/funding/capacities unconfirmed. No external action is authorized by the deck.</a:t>
+              <a:t>Status: working proposal. Site, dates, partners, funding and capacity need confirmation. The deck grants no external-action authority.</a:t>
             </a:r>
           </a:p>
           <a:p>
@@ -629,13 +629,13 @@
           </a:p>
           <a:p>
             <a:r>
-              <a:t>Do not confuse surplus with cash.</a:t>
+              <a:t>Surplus and preopening cash</a:t>
             </a:r>
           </a:p>
           <a:p/>
           <a:p>
             <a:r>
-              <a:t>Illustrative core model before actual contracts, tax and claims.</a:t>
+              <a:t>The model tests unverified income, costs, cash restrictions and reserve assumptions.</a:t>
             </a:r>
           </a:p>
           <a:p/>
@@ -662,7 +662,7 @@
           <a:p/>
           <a:p>
             <a:r>
-              <a:t>Status: working proposal; site/date/partners/funding/capacities unconfirmed. No external action is authorized by the deck.</a:t>
+              <a:t>Status: working proposal. Site, dates, partners, funding and capacity need confirmation. The deck grants no external-action authority.</a:t>
             </a:r>
           </a:p>
           <a:p>
@@ -752,13 +752,13 @@
           </a:p>
           <a:p>
             <a:r>
-              <a:t>Controls before scale.</a:t>
+              <a:t>Conditions before expansion</a:t>
             </a:r>
           </a:p>
           <a:p/>
           <a:p>
             <a:r>
-              <a:t>No grants or celebrity participation are required assumptions.</a:t>
+              <a:t>The base model assumes no public grants or celebrity participation.</a:t>
             </a:r>
           </a:p>
           <a:p/>
@@ -780,7 +780,7 @@
           <a:p/>
           <a:p>
             <a:r>
-              <a:t>Status: working proposal; site/date/partners/funding/capacities unconfirmed. No external action is authorized by the deck.</a:t>
+              <a:t>Status: working proposal. Site, dates, partners, funding and capacity need confirmation. The deck grants no external-action authority.</a:t>
             </a:r>
           </a:p>
           <a:p>
@@ -870,13 +870,13 @@
           </a:p>
           <a:p>
             <a:r>
-              <a:t>Know what happens next.</a:t>
+              <a:t>Project decision dates</a:t>
             </a:r>
           </a:p>
           <a:p/>
           <a:p>
             <a:r>
-              <a:t>Project day one is November 1, 2026; the event week remains proposed.</a:t>
+              <a:t>Project day one is November 1, 2026. Event dates remain proposals.</a:t>
             </a:r>
           </a:p>
           <a:p/>
@@ -903,7 +903,7 @@
           <a:p/>
           <a:p>
             <a:r>
-              <a:t>Status: working proposal; site/date/partners/funding/capacities unconfirmed. No external action is authorized by the deck.</a:t>
+              <a:t>Status: working proposal. Site, dates, partners, funding and capacity need confirmation. The deck grants no external-action authority.</a:t>
             </a:r>
           </a:p>
           <a:p>
@@ -993,13 +993,13 @@
           </a:p>
           <a:p>
             <a:r>
-              <a:t>Underwrite a defined decision.</a:t>
+              <a:t>Discovery contract discussion</a:t>
             </a:r>
           </a:p>
           <a:p/>
           <a:p>
             <a:r>
-              <a:t>Discuss a $75,000 milestone-based discovery contract, with clear deliverables and stop terms.</a:t>
+              <a:t>A $75,000 milestone-based agreement would define deliverables, payment and stopping terms.</a:t>
             </a:r>
           </a:p>
           <a:p/>
@@ -1021,7 +1021,7 @@
           <a:p/>
           <a:p>
             <a:r>
-              <a:t>Status: working proposal; site/date/partners/funding/capacities unconfirmed. No external action is authorized by the deck.</a:t>
+              <a:t>Status: working proposal. Site, dates, partners, funding and capacity need confirmation. The deck grants no external-action authority.</a:t>
             </a:r>
           </a:p>
           <a:p>
@@ -1111,13 +1111,13 @@
           </a:p>
           <a:p>
             <a:r>
-              <a:t>A transparent proposal.</a:t>
+              <a:t>Sources and unresolved terms</a:t>
             </a:r>
           </a:p>
           <a:p/>
           <a:p>
             <a:r>
-              <a:t>Market, venue and candidate research is sourced; demand, costs and all commercial terms remain unvalidated.</a:t>
+              <a:t>Research supports context. Demand, costs and commercial terms still need evidence.</a:t>
             </a:r>
           </a:p>
           <a:p/>
@@ -1133,13 +1133,13 @@
           </a:p>
           <a:p>
             <a:r>
-              <a:t>No party has been contacted or committed by creating this deck.</a:t>
+              <a:t>Creating this deck made no contact or commitment.</a:t>
             </a:r>
           </a:p>
           <a:p/>
           <a:p>
             <a:r>
-              <a:t>Status: working proposal; site/date/partners/funding/capacities unconfirmed. No external action is authorized by the deck.</a:t>
+              <a:t>Status: working proposal. Site, dates, partners, funding and capacity need confirmation. The deck grants no external-action authority.</a:t>
             </a:r>
           </a:p>
           <a:p>
@@ -1229,13 +1229,13 @@
           </a:p>
           <a:p>
             <a:r>
-              <a:t>Three outcomes worth backing.</a:t>
+              <a:t>Artist income and public access</a:t>
             </a:r>
           </a:p>
           <a:p/>
           <a:p>
             <a:r>
-              <a:t>A cultural event should create value beyond its opening photograph.</a:t>
+              <a:t>The proposal measures completed sales, paid creative work and visitor access.</a:t>
             </a:r>
           </a:p>
           <a:p/>
@@ -1246,18 +1246,18 @@
           </a:p>
           <a:p>
             <a:r>
-              <a:t>Public discovery / A generous encounter with art across backgrounds and budgets.</a:t>
-            </a:r>
-          </a:p>
-          <a:p>
-            <a:r>
-              <a:t>A credible destination / An excellent experience with accountable delivery.</a:t>
+              <a:t>Public discovery / Free core exhibitions and paid educators, with access information for visitors.</a:t>
+            </a:r>
+          </a:p>
+          <a:p>
+            <a:r>
+              <a:t>A credible destination / A Denver visit supported by confirmed work, appointments and transport information.</a:t>
             </a:r>
           </a:p>
           <a:p/>
           <a:p>
             <a:r>
-              <a:t>Status: working proposal; site/date/partners/funding/capacities unconfirmed. No external action is authorized by the deck.</a:t>
+              <a:t>Status: working proposal. Site, dates, partners, funding and capacity need confirmation. The deck grants no external-action authority.</a:t>
             </a:r>
           </a:p>
           <a:p>
@@ -1347,13 +1347,13 @@
           </a:p>
           <a:p>
             <a:r>
-              <a:t>First, fund the evidence.</a:t>
+              <a:t>A $75,000 discovery target</a:t>
             </a:r>
           </a:p>
           <a:p/>
           <a:p>
             <a:r>
-              <a:t>A bounded paid-discovery target, credited once within later sponsorship if agreed.</a:t>
+              <a:t>The parties may agree to count discovery support once within later sponsorship.</a:t>
             </a:r>
           </a:p>
           <a:p/>
@@ -1375,7 +1375,7 @@
           <a:p/>
           <a:p>
             <a:r>
-              <a:t>Status: working proposal; site/date/partners/funding/capacities unconfirmed. No external action is authorized by the deck.</a:t>
+              <a:t>Status: working proposal. Site, dates, partners, funding and capacity need confirmation. The deck grants no external-action authority.</a:t>
             </a:r>
           </a:p>
           <a:p>
@@ -1465,13 +1465,13 @@
           </a:p>
           <a:p>
             <a:r>
-              <a:t>What the first commitment buys.</a:t>
+              <a:t>Discovery deliverables</a:t>
             </a:r>
           </a:p>
           <a:p/>
           <a:p>
             <a:r>
-              <a:t>No unconditional promise to launch.</a:t>
+              <a:t>The paid scope tests the site, demand, art offer, costs and finance before an event decision.</a:t>
             </a:r>
           </a:p>
           <a:p/>
@@ -1493,7 +1493,7 @@
           <a:p/>
           <a:p>
             <a:r>
-              <a:t>Status: working proposal; site/date/partners/funding/capacities unconfirmed. No external action is authorized by the deck.</a:t>
+              <a:t>Status: working proposal. Site, dates, partners, funding and capacity need confirmation. The deck grants no external-action authority.</a:t>
             </a:r>
           </a:p>
           <a:p>
@@ -1583,13 +1583,13 @@
           </a:p>
           <a:p>
             <a:r>
-              <a:t>A useful decision in six weeks.</a:t>
+              <a:t>Six-week decision schedule</a:t>
             </a:r>
           </a:p>
           <a:p/>
           <a:p>
             <a:r>
-              <a:t>Specific deliverables and milestone acceptance govern the paid scope.</a:t>
+              <a:t>Contracts would define milestones, acceptance and payment.</a:t>
             </a:r>
           </a:p>
           <a:p/>
@@ -1616,7 +1616,7 @@
           <a:p/>
           <a:p>
             <a:r>
-              <a:t>Status: working proposal; site/date/partners/funding/capacities unconfirmed. No external action is authorized by the deck.</a:t>
+              <a:t>Status: working proposal. Site, dates, partners, funding and capacity need confirmation. The deck grants no external-action authority.</a:t>
             </a:r>
           </a:p>
           <a:p>
@@ -1706,13 +1706,13 @@
           </a:p>
           <a:p>
             <a:r>
-              <a:t>The larger capital path.</a:t>
+              <a:t>Event funding targets</a:t>
             </a:r>
           </a:p>
           <a:p/>
           <a:p>
             <a:r>
-              <a:t>Core scenario assumptions, not funded commitments.</a:t>
+              <a:t>The core scenario has no funding commitments.</a:t>
             </a:r>
           </a:p>
           <a:p/>
@@ -1734,7 +1734,7 @@
           <a:p/>
           <a:p>
             <a:r>
-              <a:t>Status: working proposal; site/date/partners/funding/capacities unconfirmed. No external action is authorized by the deck.</a:t>
+              <a:t>Status: working proposal. Site, dates, partners, funding and capacity need confirmation. The deck grants no external-action authority.</a:t>
             </a:r>
           </a:p>
           <a:p>
@@ -1824,13 +1824,13 @@
           </a:p>
           <a:p>
             <a:r>
-              <a:t>The market target.</a:t>
+              <a:t>Art-sales assumptions</a:t>
             </a:r>
           </a:p>
           <a:p/>
           <a:p>
             <a:r>
-              <a:t>Art GMV is seller money and does not finance the event.</a:t>
+              <a:t>Artwork proceeds pay sellers and stay separate from event finance.</a:t>
             </a:r>
           </a:p>
           <a:p/>
@@ -1852,7 +1852,7 @@
           <a:p/>
           <a:p>
             <a:r>
-              <a:t>Status: working proposal; site/date/partners/funding/capacities unconfirmed. No external action is authorized by the deck.</a:t>
+              <a:t>Status: working proposal. Site, dates, partners, funding and capacity need confirmation. The deck grants no external-action authority.</a:t>
             </a:r>
           </a:p>
           <a:p>
@@ -1942,13 +1942,13 @@
           </a:p>
           <a:p>
             <a:r>
-              <a:t>Pay the people doing the work.</a:t>
+              <a:t>Team and artist pay</a:t>
             </a:r>
           </a:p>
           <a:p/>
           <a:p>
             <a:r>
-              <a:t>Defined fees and scope first; appropriate upside can be additional.</a:t>
+              <a:t>Budget defined work first. Agree any additional bonus separately.</a:t>
             </a:r>
           </a:p>
           <a:p/>
@@ -1970,7 +1970,7 @@
           <a:p/>
           <a:p>
             <a:r>
-              <a:t>Status: working proposal; site/date/partners/funding/capacities unconfirmed. No external action is authorized by the deck.</a:t>
+              <a:t>Status: working proposal. Site, dates, partners, funding and capacity need confirmation. The deck grants no external-action authority.</a:t>
             </a:r>
           </a:p>
           <a:p>
@@ -2060,13 +2060,13 @@
           </a:p>
           <a:p>
             <a:r>
-              <a:t>Why this host could matter.</a:t>
+              <a:t>Owner fit and site limits</a:t>
             </a:r>
           </a:p>
           <a:p/>
           <a:p>
             <a:r>
-              <a:t>Space and creative ambition meet a rental/office redevelopment strategy.</a:t>
+              <a:t>The fair could support the rental and office project if the owner confirms a usable footprint.</a:t>
             </a:r>
           </a:p>
           <a:p/>
@@ -2088,7 +2088,7 @@
           <a:p/>
           <a:p>
             <a:r>
-              <a:t>Status: working proposal; site/date/partners/funding/capacities unconfirmed. No external action is authorized by the deck.</a:t>
+              <a:t>Status: working proposal. Site, dates, partners, funding and capacity need confirmation. The deck grants no external-action authority.</a:t>
             </a:r>
           </a:p>
           <a:p>
@@ -5291,7 +5291,7 @@
               </a:defRPr>
             </a:pPr>
             <a:r>
-              <a:t>Fund a disciplined path from ambition to a decision.</a:t>
+              <a:t>A proposed six-week feasibility stage.</a:t>
             </a:r>
           </a:p>
         </p:txBody>
@@ -5974,7 +5974,7 @@
               </a:defRPr>
             </a:pPr>
             <a:r>
-              <a:t>Do not confuse surplus with cash.</a:t>
+              <a:t>Surplus and preopening cash</a:t>
             </a:r>
           </a:p>
         </p:txBody>
@@ -6019,7 +6019,7 @@
               </a:defRPr>
             </a:pPr>
             <a:r>
-              <a:t>Illustrative core model before actual contracts, tax and claims.</a:t>
+              <a:t>The model tests unverified income, costs, cash restrictions and reserve assumptions.</a:t>
             </a:r>
           </a:p>
         </p:txBody>
@@ -6845,7 +6845,7 @@
               </a:defRPr>
             </a:pPr>
             <a:r>
-              <a:t>Controls before scale.</a:t>
+              <a:t>Conditions before expansion</a:t>
             </a:r>
           </a:p>
         </p:txBody>
@@ -6890,7 +6890,7 @@
               </a:defRPr>
             </a:pPr>
             <a:r>
-              <a:t>No grants or celebrity participation are required assumptions.</a:t>
+              <a:t>The base model assumes no public grants or celebrity participation.</a:t>
             </a:r>
           </a:p>
         </p:txBody>
@@ -7822,7 +7822,7 @@
               </a:defRPr>
             </a:pPr>
             <a:r>
-              <a:t>Know what happens next.</a:t>
+              <a:t>Project decision dates</a:t>
             </a:r>
           </a:p>
         </p:txBody>
@@ -7867,7 +7867,7 @@
               </a:defRPr>
             </a:pPr>
             <a:r>
-              <a:t>Project day one is November 1, 2026; the event week remains proposed.</a:t>
+              <a:t>Project day one is November 1, 2026. Event dates remain proposals.</a:t>
             </a:r>
           </a:p>
         </p:txBody>
@@ -8975,7 +8975,7 @@
               </a:defRPr>
             </a:pPr>
             <a:r>
-              <a:t>Underwrite a defined</a:t>
+              <a:t>Discovery contract</a:t>
             </a:r>
           </a:p>
           <a:p>
@@ -8997,7 +8997,7 @@
               </a:defRPr>
             </a:pPr>
             <a:r>
-              <a:t>decision.</a:t>
+              <a:t>discussion</a:t>
             </a:r>
           </a:p>
         </p:txBody>
@@ -9042,7 +9042,7 @@
               </a:defRPr>
             </a:pPr>
             <a:r>
-              <a:t>Discuss a $75,000 milestone-based discovery contract, with clear</a:t>
+              <a:t>A $75,000 milestone-based agreement would define deliverables,</a:t>
             </a:r>
           </a:p>
           <a:p>
@@ -9064,7 +9064,7 @@
               </a:defRPr>
             </a:pPr>
             <a:r>
-              <a:t>deliverables and stop terms.</a:t>
+              <a:t>payment and stopping terms.</a:t>
             </a:r>
           </a:p>
         </p:txBody>
@@ -9966,7 +9966,7 @@
               </a:defRPr>
             </a:pPr>
             <a:r>
-              <a:t>A transparent proposal.</a:t>
+              <a:t>Sources and unresolved terms</a:t>
             </a:r>
           </a:p>
         </p:txBody>
@@ -10011,7 +10011,7 @@
               </a:defRPr>
             </a:pPr>
             <a:r>
-              <a:t>Market, venue and candidate research is sourced; demand, costs and all commercial terms remain unvalidated.</a:t>
+              <a:t>Research supports context. Demand, costs and commercial terms still need evidence.</a:t>
             </a:r>
           </a:p>
         </p:txBody>
@@ -10281,7 +10281,7 @@
               </a:defRPr>
             </a:pPr>
             <a:r>
-              <a:t>No party has been contacted or committed by creating this deck.</a:t>
+              <a:t>Creating this deck made no contact or commitment.</a:t>
             </a:r>
           </a:p>
         </p:txBody>
@@ -10575,7 +10575,7 @@
               </a:defRPr>
             </a:pPr>
             <a:r>
-              <a:t>Three outcomes worth backing.</a:t>
+              <a:t>Artist income and public access</a:t>
             </a:r>
           </a:p>
         </p:txBody>
@@ -10620,7 +10620,7 @@
               </a:defRPr>
             </a:pPr>
             <a:r>
-              <a:t>A cultural event should create value beyond its opening photograph.</a:t>
+              <a:t>The proposal measures completed sales, paid creative work and visitor access.</a:t>
             </a:r>
           </a:p>
         </p:txBody>
@@ -10994,7 +10994,7 @@
               </a:defRPr>
             </a:pPr>
             <a:r>
-              <a:t>A generous encounter with art</a:t>
+              <a:t>Free core exhibitions and paid</a:t>
             </a:r>
           </a:p>
           <a:p>
@@ -11016,7 +11016,7 @@
               </a:defRPr>
             </a:pPr>
             <a:r>
-              <a:t>across backgrounds and</a:t>
+              <a:t>educators, with access</a:t>
             </a:r>
           </a:p>
           <a:p>
@@ -11038,7 +11038,7 @@
               </a:defRPr>
             </a:pPr>
             <a:r>
-              <a:t>budgets.</a:t>
+              <a:t>information for visitors.</a:t>
             </a:r>
           </a:p>
         </p:txBody>
@@ -11214,7 +11214,7 @@
               </a:defRPr>
             </a:pPr>
             <a:r>
-              <a:t>An excellent experience with</a:t>
+              <a:t>A Denver visit supported by</a:t>
             </a:r>
           </a:p>
           <a:p>
@@ -11236,7 +11236,29 @@
               </a:defRPr>
             </a:pPr>
             <a:r>
-              <a:t>accountable delivery.</a:t>
+              <a:t>confirmed work, appointments</a:t>
+            </a:r>
+          </a:p>
+          <a:p>
+            <a:pPr>
+              <a:lnSpc>
+                <a:spcPct val="108000"/>
+              </a:lnSpc>
+              <a:spcBef>
+                <a:spcPts val="0"/>
+              </a:spcBef>
+              <a:spcAft>
+                <a:spcPts val="0"/>
+              </a:spcAft>
+              <a:defRPr sz="2100" b="0">
+                <a:solidFill>
+                  <a:srgbClr val="151A22"/>
+                </a:solidFill>
+                <a:latin typeface="Arial"/>
+              </a:defRPr>
+            </a:pPr>
+            <a:r>
+              <a:t>and transport information.</a:t>
             </a:r>
           </a:p>
         </p:txBody>
@@ -11530,7 +11552,7 @@
               </a:defRPr>
             </a:pPr>
             <a:r>
-              <a:t>First, fund the evidence.</a:t>
+              <a:t>A $75,000 discovery target</a:t>
             </a:r>
           </a:p>
         </p:txBody>
@@ -11575,7 +11597,7 @@
               </a:defRPr>
             </a:pPr>
             <a:r>
-              <a:t>A bounded paid-discovery target, credited once within later sponsorship if agreed.</a:t>
+              <a:t>The parties may agree to count discovery support once within later sponsorship.</a:t>
             </a:r>
           </a:p>
         </p:txBody>
@@ -12397,7 +12419,7 @@
               </a:defRPr>
             </a:pPr>
             <a:r>
-              <a:t>What the first commitment buys.</a:t>
+              <a:t>Discovery deliverables</a:t>
             </a:r>
           </a:p>
         </p:txBody>
@@ -12442,7 +12464,7 @@
               </a:defRPr>
             </a:pPr>
             <a:r>
-              <a:t>No unconditional promise to launch.</a:t>
+              <a:t>The paid scope tests the site, demand, art offer, costs and finance before an event decision.</a:t>
             </a:r>
           </a:p>
         </p:txBody>
@@ -13396,7 +13418,7 @@
               </a:defRPr>
             </a:pPr>
             <a:r>
-              <a:t>A useful decision in six weeks.</a:t>
+              <a:t>Six-week decision schedule</a:t>
             </a:r>
           </a:p>
         </p:txBody>
@@ -13441,7 +13463,7 @@
               </a:defRPr>
             </a:pPr>
             <a:r>
-              <a:t>Specific deliverables and milestone acceptance govern the paid scope.</a:t>
+              <a:t>Contracts would define milestones, acceptance and payment.</a:t>
             </a:r>
           </a:p>
         </p:txBody>
@@ -14615,7 +14637,7 @@
               </a:defRPr>
             </a:pPr>
             <a:r>
-              <a:t>The larger capital path.</a:t>
+              <a:t>Event funding targets</a:t>
             </a:r>
           </a:p>
         </p:txBody>
@@ -14660,7 +14682,7 @@
               </a:defRPr>
             </a:pPr>
             <a:r>
-              <a:t>Core scenario assumptions, not funded commitments.</a:t>
+              <a:t>The core scenario has no funding commitments.</a:t>
             </a:r>
           </a:p>
         </p:txBody>
@@ -15504,7 +15526,7 @@
               </a:defRPr>
             </a:pPr>
             <a:r>
-              <a:t>The market target.</a:t>
+              <a:t>Art-sales assumptions</a:t>
             </a:r>
           </a:p>
         </p:txBody>
@@ -15549,7 +15571,7 @@
               </a:defRPr>
             </a:pPr>
             <a:r>
-              <a:t>Art GMV is seller money and does not finance the event.</a:t>
+              <a:t>Artwork proceeds pay sellers and stay separate from event finance.</a:t>
             </a:r>
           </a:p>
         </p:txBody>
@@ -16415,7 +16437,7 @@
               </a:defRPr>
             </a:pPr>
             <a:r>
-              <a:t>Pay the people doing the work.</a:t>
+              <a:t>Team and artist pay</a:t>
             </a:r>
           </a:p>
         </p:txBody>
@@ -16460,7 +16482,7 @@
               </a:defRPr>
             </a:pPr>
             <a:r>
-              <a:t>Defined fees and scope first; appropriate upside can be additional.</a:t>
+              <a:t>Budget defined work first. Agree any additional bonus separately.</a:t>
             </a:r>
           </a:p>
         </p:txBody>
@@ -17370,7 +17392,7 @@
               </a:defRPr>
             </a:pPr>
             <a:r>
-              <a:t>Why this host could matter.</a:t>
+              <a:t>Owner fit and site limits</a:t>
             </a:r>
           </a:p>
         </p:txBody>
@@ -17415,7 +17437,7 @@
               </a:defRPr>
             </a:pPr>
             <a:r>
-              <a:t>Space and creative ambition meet a rental/office redevelopment strategy.</a:t>
+              <a:t>The fair could support the rental and office project if the owner confirms a usable footprint.</a:t>
             </a:r>
           </a:p>
         </p:txBody>
